--- a/Causal_Inference_Course/Week02_Potential_Outcomes/Week02_Potential_Outcomes_Lecture.pptx
+++ b/Causal_Inference_Course/Week02_Potential_Outcomes/Week02_Potential_Outcomes_Lecture.pptx
@@ -6532,7 +6532,7 @@
                 </a:solidFill>
                 <a:latin typeface="Calibri"/>
               </a:rPr>
-              <a:t>ATE and ATT coincide only under constant or randomly-spread effects. Say which you mean.</a:t>
+              <a:t>ATE and ATT coincide only under constant effects, or no selection on the effect. Say which you mean.</a:t>
             </a:r>
           </a:p>
         </p:txBody>
